--- a/firmgrid/submission/[TEAM_NAME]_FirmGrid_Slides(backup).pptx
+++ b/firmgrid/submission/[TEAM_NAME]_FirmGrid_Slides(backup).pptx
@@ -3739,7 +3739,7 @@
         </p:nvSpPr>
         <p:spPr>
           <a:xfrm>
-            <a:off x="0" y="0"/>
+            <a:off x="12893631" y="-91440"/>
             <a:ext cx="12191695" cy="6858000"/>
           </a:xfrm>
           <a:prstGeom prst="rect">
